--- a/FastX-PPT.pptx
+++ b/FastX-PPT.pptx
@@ -151,7 +151,7 @@
       </p:grpSpPr>
       <p:sp>
         <p:nvSpPr>
-          <p:cNvPr id="1855772565" name="Header Placeholder 1"/>
+          <p:cNvPr id="609159077" name="Header Placeholder 1"/>
           <p:cNvSpPr>
             <a:spLocks noGrp="1"/>
           </p:cNvSpPr>
@@ -185,7 +185,7 @@
       </p:sp>
       <p:sp>
         <p:nvSpPr>
-          <p:cNvPr id="1041803173" name="Date Placeholder 2"/>
+          <p:cNvPr id="2109217774" name="Date Placeholder 2"/>
           <p:cNvSpPr>
             <a:spLocks noGrp="1"/>
           </p:cNvSpPr>
@@ -223,7 +223,7 @@
       </p:sp>
       <p:sp>
         <p:nvSpPr>
-          <p:cNvPr id="832254718" name="Slide Image Placeholder 3"/>
+          <p:cNvPr id="377155335" name="Slide Image Placeholder 3"/>
           <p:cNvSpPr>
             <a:spLocks noChangeAspect="1" noGrp="1" noRot="1"/>
           </p:cNvSpPr>
@@ -259,7 +259,7 @@
       </p:sp>
       <p:sp>
         <p:nvSpPr>
-          <p:cNvPr id="744064929" name="Notes Placeholder 4"/>
+          <p:cNvPr id="1399294163" name="Notes Placeholder 4"/>
           <p:cNvSpPr>
             <a:spLocks noGrp="1"/>
           </p:cNvSpPr>
@@ -333,7 +333,7 @@
       </p:sp>
       <p:sp>
         <p:nvSpPr>
-          <p:cNvPr id="144671104" name="Footer Placeholder 5"/>
+          <p:cNvPr id="1986922886" name="Footer Placeholder 5"/>
           <p:cNvSpPr>
             <a:spLocks noGrp="1"/>
           </p:cNvSpPr>
@@ -367,7 +367,7 @@
       </p:sp>
       <p:sp>
         <p:nvSpPr>
-          <p:cNvPr id="1066665964" name="Slide Number Placeholder 6"/>
+          <p:cNvPr id="167171499" name="Slide Number Placeholder 6"/>
           <p:cNvSpPr>
             <a:spLocks noGrp="1"/>
           </p:cNvSpPr>
@@ -520,7 +520,7 @@
       </p:grpSpPr>
       <p:sp>
         <p:nvSpPr>
-          <p:cNvPr id="408972298" name="Slide Image Placeholder 1"/>
+          <p:cNvPr id="640999749" name="Slide Image Placeholder 1"/>
           <p:cNvSpPr>
             <a:spLocks noChangeAspect="1" noGrp="1" noRot="1"/>
           </p:cNvSpPr>
@@ -532,7 +532,7 @@
       </p:sp>
       <p:sp>
         <p:nvSpPr>
-          <p:cNvPr id="1806567474" name="Notes Placeholder 2"/>
+          <p:cNvPr id="1695281129" name="Notes Placeholder 2"/>
           <p:cNvSpPr>
             <a:spLocks noGrp="1"/>
           </p:cNvSpPr>
@@ -554,7 +554,7 @@
       </p:sp>
       <p:sp>
         <p:nvSpPr>
-          <p:cNvPr id="1100125510" name="Slide Number Placeholder 3"/>
+          <p:cNvPr id="1037962878" name="Slide Number Placeholder 3"/>
           <p:cNvSpPr>
             <a:spLocks noGrp="1"/>
           </p:cNvSpPr>
@@ -605,7 +605,7 @@
       </p:grpSpPr>
       <p:sp>
         <p:nvSpPr>
-          <p:cNvPr id="297038723" name="Slide Image Placeholder 1"/>
+          <p:cNvPr id="1455397632" name="Slide Image Placeholder 1"/>
           <p:cNvSpPr>
             <a:spLocks noChangeAspect="1" noGrp="1" noRot="1"/>
           </p:cNvSpPr>
@@ -617,7 +617,7 @@
       </p:sp>
       <p:sp>
         <p:nvSpPr>
-          <p:cNvPr id="1407714638" name="Notes Placeholder 2"/>
+          <p:cNvPr id="1589836433" name="Notes Placeholder 2"/>
           <p:cNvSpPr>
             <a:spLocks noGrp="1"/>
           </p:cNvSpPr>
@@ -639,7 +639,7 @@
       </p:sp>
       <p:sp>
         <p:nvSpPr>
-          <p:cNvPr id="913734190" name="Slide Number Placeholder 3"/>
+          <p:cNvPr id="1090667630" name="Slide Number Placeholder 3"/>
           <p:cNvSpPr>
             <a:spLocks noGrp="1"/>
           </p:cNvSpPr>
@@ -690,7 +690,7 @@
       </p:grpSpPr>
       <p:sp>
         <p:nvSpPr>
-          <p:cNvPr id="1607183222" name="Slide Image Placeholder 1"/>
+          <p:cNvPr id="443590762" name="Slide Image Placeholder 1"/>
           <p:cNvSpPr>
             <a:spLocks noChangeAspect="1" noGrp="1" noRot="1"/>
           </p:cNvSpPr>
@@ -702,7 +702,7 @@
       </p:sp>
       <p:sp>
         <p:nvSpPr>
-          <p:cNvPr id="148279802" name="Notes Placeholder 2"/>
+          <p:cNvPr id="1440780373" name="Notes Placeholder 2"/>
           <p:cNvSpPr>
             <a:spLocks noGrp="1"/>
           </p:cNvSpPr>
@@ -724,7 +724,7 @@
       </p:sp>
       <p:sp>
         <p:nvSpPr>
-          <p:cNvPr id="1383808712" name="Slide Number Placeholder 3"/>
+          <p:cNvPr id="441815685" name="Slide Number Placeholder 3"/>
           <p:cNvSpPr>
             <a:spLocks noGrp="1"/>
           </p:cNvSpPr>
@@ -775,7 +775,7 @@
       </p:grpSpPr>
       <p:sp>
         <p:nvSpPr>
-          <p:cNvPr id="1838970779" name="Slide Image Placeholder 1"/>
+          <p:cNvPr id="1770581682" name="Slide Image Placeholder 1"/>
           <p:cNvSpPr>
             <a:spLocks noChangeAspect="1" noGrp="1" noRot="1"/>
           </p:cNvSpPr>
@@ -787,7 +787,7 @@
       </p:sp>
       <p:sp>
         <p:nvSpPr>
-          <p:cNvPr id="1534165975" name="Notes Placeholder 2"/>
+          <p:cNvPr id="436594198" name="Notes Placeholder 2"/>
           <p:cNvSpPr>
             <a:spLocks noGrp="1"/>
           </p:cNvSpPr>
@@ -809,7 +809,7 @@
       </p:sp>
       <p:sp>
         <p:nvSpPr>
-          <p:cNvPr id="654319253" name="Slide Number Placeholder 3"/>
+          <p:cNvPr id="951463595" name="Slide Number Placeholder 3"/>
           <p:cNvSpPr>
             <a:spLocks noGrp="1"/>
           </p:cNvSpPr>
@@ -860,7 +860,7 @@
       </p:grpSpPr>
       <p:sp>
         <p:nvSpPr>
-          <p:cNvPr id="1520762533" name="Slide Image Placeholder 1"/>
+          <p:cNvPr id="1417935319" name="Slide Image Placeholder 1"/>
           <p:cNvSpPr>
             <a:spLocks noChangeAspect="1" noGrp="1" noRot="1"/>
           </p:cNvSpPr>
@@ -872,7 +872,7 @@
       </p:sp>
       <p:sp>
         <p:nvSpPr>
-          <p:cNvPr id="1781640696" name="Notes Placeholder 2"/>
+          <p:cNvPr id="2083642539" name="Notes Placeholder 2"/>
           <p:cNvSpPr>
             <a:spLocks noGrp="1"/>
           </p:cNvSpPr>
@@ -894,7 +894,7 @@
       </p:sp>
       <p:sp>
         <p:nvSpPr>
-          <p:cNvPr id="985258493" name="Slide Number Placeholder 3"/>
+          <p:cNvPr id="203004070" name="Slide Number Placeholder 3"/>
           <p:cNvSpPr>
             <a:spLocks noGrp="1"/>
           </p:cNvSpPr>
@@ -945,7 +945,7 @@
       </p:grpSpPr>
       <p:sp>
         <p:nvSpPr>
-          <p:cNvPr id="1760281285" name="Slide Image Placeholder 1"/>
+          <p:cNvPr id="284260112" name="Slide Image Placeholder 1"/>
           <p:cNvSpPr>
             <a:spLocks noChangeAspect="1" noGrp="1" noRot="1"/>
           </p:cNvSpPr>
@@ -957,7 +957,7 @@
       </p:sp>
       <p:sp>
         <p:nvSpPr>
-          <p:cNvPr id="1234525204" name="Notes Placeholder 2"/>
+          <p:cNvPr id="265594761" name="Notes Placeholder 2"/>
           <p:cNvSpPr>
             <a:spLocks noGrp="1"/>
           </p:cNvSpPr>
@@ -979,7 +979,7 @@
       </p:sp>
       <p:sp>
         <p:nvSpPr>
-          <p:cNvPr id="1529270895" name="Slide Number Placeholder 3"/>
+          <p:cNvPr id="1254239777" name="Slide Number Placeholder 3"/>
           <p:cNvSpPr>
             <a:spLocks noGrp="1"/>
           </p:cNvSpPr>
@@ -1030,7 +1030,7 @@
       </p:grpSpPr>
       <p:sp>
         <p:nvSpPr>
-          <p:cNvPr id="816090009" name="Slide Image Placeholder 1"/>
+          <p:cNvPr id="793772432" name="Slide Image Placeholder 1"/>
           <p:cNvSpPr>
             <a:spLocks noChangeAspect="1" noGrp="1" noRot="1"/>
           </p:cNvSpPr>
@@ -1042,7 +1042,7 @@
       </p:sp>
       <p:sp>
         <p:nvSpPr>
-          <p:cNvPr id="1639013801" name="Notes Placeholder 2"/>
+          <p:cNvPr id="856083781" name="Notes Placeholder 2"/>
           <p:cNvSpPr>
             <a:spLocks noGrp="1"/>
           </p:cNvSpPr>
@@ -1064,7 +1064,7 @@
       </p:sp>
       <p:sp>
         <p:nvSpPr>
-          <p:cNvPr id="1565729602" name="Slide Number Placeholder 3"/>
+          <p:cNvPr id="2111880816" name="Slide Number Placeholder 3"/>
           <p:cNvSpPr>
             <a:spLocks noGrp="1"/>
           </p:cNvSpPr>
@@ -1115,7 +1115,7 @@
       </p:grpSpPr>
       <p:sp>
         <p:nvSpPr>
-          <p:cNvPr id="2" name="Slide Image Placeholder 1"/>
+          <p:cNvPr id="1719051613" name="Slide Image Placeholder 1"/>
           <p:cNvSpPr>
             <a:spLocks noChangeAspect="1" noGrp="1" noRot="1"/>
           </p:cNvSpPr>
@@ -1127,7 +1127,7 @@
       </p:sp>
       <p:sp>
         <p:nvSpPr>
-          <p:cNvPr id="3" name="Notes Placeholder 2"/>
+          <p:cNvPr id="102880987" name="Notes Placeholder 2"/>
           <p:cNvSpPr>
             <a:spLocks noGrp="1"/>
           </p:cNvSpPr>
@@ -1149,7 +1149,7 @@
       </p:sp>
       <p:sp>
         <p:nvSpPr>
-          <p:cNvPr id="4" name="Slide Number Placeholder 3"/>
+          <p:cNvPr id="1879130481" name="Slide Number Placeholder 3"/>
           <p:cNvSpPr>
             <a:spLocks noGrp="1"/>
           </p:cNvSpPr>
@@ -1200,7 +1200,7 @@
       </p:grpSpPr>
       <p:sp>
         <p:nvSpPr>
-          <p:cNvPr id="2" name="Slide Image Placeholder 1"/>
+          <p:cNvPr id="1053515035" name="Slide Image Placeholder 1"/>
           <p:cNvSpPr>
             <a:spLocks noChangeAspect="1" noGrp="1" noRot="1"/>
           </p:cNvSpPr>
@@ -1212,7 +1212,7 @@
       </p:sp>
       <p:sp>
         <p:nvSpPr>
-          <p:cNvPr id="3" name="Notes Placeholder 2"/>
+          <p:cNvPr id="90093907" name="Notes Placeholder 2"/>
           <p:cNvSpPr>
             <a:spLocks noGrp="1"/>
           </p:cNvSpPr>
@@ -1234,7 +1234,7 @@
       </p:sp>
       <p:sp>
         <p:nvSpPr>
-          <p:cNvPr id="4" name="Slide Number Placeholder 3"/>
+          <p:cNvPr id="745786720" name="Slide Number Placeholder 3"/>
           <p:cNvSpPr>
             <a:spLocks noGrp="1"/>
           </p:cNvSpPr>
@@ -1285,7 +1285,7 @@
       </p:grpSpPr>
       <p:sp>
         <p:nvSpPr>
-          <p:cNvPr id="144445085" name="Slide Image Placeholder 1"/>
+          <p:cNvPr id="2074096593" name="Slide Image Placeholder 1"/>
           <p:cNvSpPr>
             <a:spLocks noChangeAspect="1" noGrp="1" noRot="1"/>
           </p:cNvSpPr>
@@ -1297,7 +1297,7 @@
       </p:sp>
       <p:sp>
         <p:nvSpPr>
-          <p:cNvPr id="369299259" name="Notes Placeholder 2"/>
+          <p:cNvPr id="1995380417" name="Notes Placeholder 2"/>
           <p:cNvSpPr>
             <a:spLocks noGrp="1"/>
           </p:cNvSpPr>
@@ -1319,7 +1319,7 @@
       </p:sp>
       <p:sp>
         <p:nvSpPr>
-          <p:cNvPr id="1365104282" name="Slide Number Placeholder 3"/>
+          <p:cNvPr id="1085710650" name="Slide Number Placeholder 3"/>
           <p:cNvSpPr>
             <a:spLocks noGrp="1"/>
           </p:cNvSpPr>
@@ -1370,7 +1370,7 @@
       </p:grpSpPr>
       <p:sp>
         <p:nvSpPr>
-          <p:cNvPr id="1524214566" name="Slide Image Placeholder 1"/>
+          <p:cNvPr id="299173614" name="Slide Image Placeholder 1"/>
           <p:cNvSpPr>
             <a:spLocks noChangeAspect="1" noGrp="1" noRot="1"/>
           </p:cNvSpPr>
@@ -1382,7 +1382,7 @@
       </p:sp>
       <p:sp>
         <p:nvSpPr>
-          <p:cNvPr id="1708488108" name="Notes Placeholder 2"/>
+          <p:cNvPr id="998134097" name="Notes Placeholder 2"/>
           <p:cNvSpPr>
             <a:spLocks noGrp="1"/>
           </p:cNvSpPr>
@@ -1404,7 +1404,7 @@
       </p:sp>
       <p:sp>
         <p:nvSpPr>
-          <p:cNvPr id="1862337451" name="Slide Number Placeholder 3"/>
+          <p:cNvPr id="1272222289" name="Slide Number Placeholder 3"/>
           <p:cNvSpPr>
             <a:spLocks noGrp="1"/>
           </p:cNvSpPr>
@@ -1455,7 +1455,7 @@
       </p:grpSpPr>
       <p:sp>
         <p:nvSpPr>
-          <p:cNvPr id="621702410" name="Slide Image Placeholder 1"/>
+          <p:cNvPr id="644714014" name="Slide Image Placeholder 1"/>
           <p:cNvSpPr>
             <a:spLocks noChangeAspect="1" noGrp="1" noRot="1"/>
           </p:cNvSpPr>
@@ -1467,7 +1467,7 @@
       </p:sp>
       <p:sp>
         <p:nvSpPr>
-          <p:cNvPr id="1926950850" name="Notes Placeholder 2"/>
+          <p:cNvPr id="1822957531" name="Notes Placeholder 2"/>
           <p:cNvSpPr>
             <a:spLocks noGrp="1"/>
           </p:cNvSpPr>
@@ -1489,7 +1489,7 @@
       </p:sp>
       <p:sp>
         <p:nvSpPr>
-          <p:cNvPr id="1249125339" name="Slide Number Placeholder 3"/>
+          <p:cNvPr id="50806984" name="Slide Number Placeholder 3"/>
           <p:cNvSpPr>
             <a:spLocks noGrp="1"/>
           </p:cNvSpPr>
@@ -1540,7 +1540,7 @@
       </p:grpSpPr>
       <p:sp>
         <p:nvSpPr>
-          <p:cNvPr id="2128401164" name="Slide Image Placeholder 1"/>
+          <p:cNvPr id="1916832509" name="Slide Image Placeholder 1"/>
           <p:cNvSpPr>
             <a:spLocks noChangeAspect="1" noGrp="1" noRot="1"/>
           </p:cNvSpPr>
@@ -1552,7 +1552,7 @@
       </p:sp>
       <p:sp>
         <p:nvSpPr>
-          <p:cNvPr id="939756783" name="Notes Placeholder 2"/>
+          <p:cNvPr id="1592023601" name="Notes Placeholder 2"/>
           <p:cNvSpPr>
             <a:spLocks noGrp="1"/>
           </p:cNvSpPr>
@@ -1574,7 +1574,7 @@
       </p:sp>
       <p:sp>
         <p:nvSpPr>
-          <p:cNvPr id="144224523" name="Slide Number Placeholder 3"/>
+          <p:cNvPr id="1050160722" name="Slide Number Placeholder 3"/>
           <p:cNvSpPr>
             <a:spLocks noGrp="1"/>
           </p:cNvSpPr>
@@ -1625,7 +1625,7 @@
       </p:grpSpPr>
       <p:sp>
         <p:nvSpPr>
-          <p:cNvPr id="2" name="Slide Image Placeholder 1"/>
+          <p:cNvPr id="2031166732" name="Slide Image Placeholder 1"/>
           <p:cNvSpPr>
             <a:spLocks noChangeAspect="1" noGrp="1" noRot="1"/>
           </p:cNvSpPr>
@@ -1637,7 +1637,7 @@
       </p:sp>
       <p:sp>
         <p:nvSpPr>
-          <p:cNvPr id="3" name="Notes Placeholder 2"/>
+          <p:cNvPr id="1201338858" name="Notes Placeholder 2"/>
           <p:cNvSpPr>
             <a:spLocks noGrp="1"/>
           </p:cNvSpPr>
@@ -1659,7 +1659,7 @@
       </p:sp>
       <p:sp>
         <p:nvSpPr>
-          <p:cNvPr id="4" name="Slide Number Placeholder 3"/>
+          <p:cNvPr id="994460139" name="Slide Number Placeholder 3"/>
           <p:cNvSpPr>
             <a:spLocks noGrp="1"/>
           </p:cNvSpPr>
@@ -1710,7 +1710,7 @@
       </p:grpSpPr>
       <p:sp>
         <p:nvSpPr>
-          <p:cNvPr id="1034319456" name="Slide Image Placeholder 1"/>
+          <p:cNvPr id="450162733" name="Slide Image Placeholder 1"/>
           <p:cNvSpPr>
             <a:spLocks noChangeAspect="1" noGrp="1" noRot="1"/>
           </p:cNvSpPr>
@@ -1722,7 +1722,7 @@
       </p:sp>
       <p:sp>
         <p:nvSpPr>
-          <p:cNvPr id="1400456552" name="Notes Placeholder 2"/>
+          <p:cNvPr id="1700681664" name="Notes Placeholder 2"/>
           <p:cNvSpPr>
             <a:spLocks noGrp="1"/>
           </p:cNvSpPr>
@@ -1744,7 +1744,7 @@
       </p:sp>
       <p:sp>
         <p:nvSpPr>
-          <p:cNvPr id="2050946579" name="Slide Number Placeholder 3"/>
+          <p:cNvPr id="474769933" name="Slide Number Placeholder 3"/>
           <p:cNvSpPr>
             <a:spLocks noGrp="1"/>
           </p:cNvSpPr>
@@ -1795,7 +1795,7 @@
       </p:grpSpPr>
       <p:sp>
         <p:nvSpPr>
-          <p:cNvPr id="835401846" name="Slide Image Placeholder 1"/>
+          <p:cNvPr id="1865021218" name="Slide Image Placeholder 1"/>
           <p:cNvSpPr>
             <a:spLocks noChangeAspect="1" noGrp="1" noRot="1"/>
           </p:cNvSpPr>
@@ -1807,7 +1807,7 @@
       </p:sp>
       <p:sp>
         <p:nvSpPr>
-          <p:cNvPr id="1190280078" name="Notes Placeholder 2"/>
+          <p:cNvPr id="1355281709" name="Notes Placeholder 2"/>
           <p:cNvSpPr>
             <a:spLocks noGrp="1"/>
           </p:cNvSpPr>
@@ -1829,7 +1829,7 @@
       </p:sp>
       <p:sp>
         <p:nvSpPr>
-          <p:cNvPr id="512487689" name="Slide Number Placeholder 3"/>
+          <p:cNvPr id="669281990" name="Slide Number Placeholder 3"/>
           <p:cNvSpPr>
             <a:spLocks noGrp="1"/>
           </p:cNvSpPr>
@@ -1880,7 +1880,7 @@
       </p:grpSpPr>
       <p:sp>
         <p:nvSpPr>
-          <p:cNvPr id="185477238" name="Slide Image Placeholder 1"/>
+          <p:cNvPr id="1962591441" name="Slide Image Placeholder 1"/>
           <p:cNvSpPr>
             <a:spLocks noChangeAspect="1" noGrp="1" noRot="1"/>
           </p:cNvSpPr>
@@ -1892,7 +1892,7 @@
       </p:sp>
       <p:sp>
         <p:nvSpPr>
-          <p:cNvPr id="287996962" name="Notes Placeholder 2"/>
+          <p:cNvPr id="886510314" name="Notes Placeholder 2"/>
           <p:cNvSpPr>
             <a:spLocks noGrp="1"/>
           </p:cNvSpPr>
@@ -1914,7 +1914,7 @@
       </p:sp>
       <p:sp>
         <p:nvSpPr>
-          <p:cNvPr id="988508703" name="Slide Number Placeholder 3"/>
+          <p:cNvPr id="873778667" name="Slide Number Placeholder 3"/>
           <p:cNvSpPr>
             <a:spLocks noGrp="1"/>
           </p:cNvSpPr>
@@ -1965,7 +1965,7 @@
       </p:grpSpPr>
       <p:sp>
         <p:nvSpPr>
-          <p:cNvPr id="878125451" name="Slide Image Placeholder 1"/>
+          <p:cNvPr id="1280799600" name="Slide Image Placeholder 1"/>
           <p:cNvSpPr>
             <a:spLocks noChangeAspect="1" noGrp="1" noRot="1"/>
           </p:cNvSpPr>
@@ -1977,7 +1977,7 @@
       </p:sp>
       <p:sp>
         <p:nvSpPr>
-          <p:cNvPr id="540650046" name="Notes Placeholder 2"/>
+          <p:cNvPr id="1832869694" name="Notes Placeholder 2"/>
           <p:cNvSpPr>
             <a:spLocks noGrp="1"/>
           </p:cNvSpPr>
@@ -1999,7 +1999,7 @@
       </p:sp>
       <p:sp>
         <p:nvSpPr>
-          <p:cNvPr id="1771174435" name="Slide Number Placeholder 3"/>
+          <p:cNvPr id="239355347" name="Slide Number Placeholder 3"/>
           <p:cNvSpPr>
             <a:spLocks noGrp="1"/>
           </p:cNvSpPr>
@@ -2050,7 +2050,7 @@
       </p:grpSpPr>
       <p:sp>
         <p:nvSpPr>
-          <p:cNvPr id="1333333033" name="Slide Image Placeholder 1"/>
+          <p:cNvPr id="93145136" name="Slide Image Placeholder 1"/>
           <p:cNvSpPr>
             <a:spLocks noChangeAspect="1" noGrp="1" noRot="1"/>
           </p:cNvSpPr>
@@ -2062,7 +2062,7 @@
       </p:sp>
       <p:sp>
         <p:nvSpPr>
-          <p:cNvPr id="404818161" name="Notes Placeholder 2"/>
+          <p:cNvPr id="1608035731" name="Notes Placeholder 2"/>
           <p:cNvSpPr>
             <a:spLocks noGrp="1"/>
           </p:cNvSpPr>
@@ -2084,7 +2084,7 @@
       </p:sp>
       <p:sp>
         <p:nvSpPr>
-          <p:cNvPr id="2047208397" name="Slide Number Placeholder 3"/>
+          <p:cNvPr id="1708209418" name="Slide Number Placeholder 3"/>
           <p:cNvSpPr>
             <a:spLocks noGrp="1"/>
           </p:cNvSpPr>
@@ -2135,7 +2135,7 @@
       </p:grpSpPr>
       <p:sp>
         <p:nvSpPr>
-          <p:cNvPr id="60436536" name="Slide Image Placeholder 1"/>
+          <p:cNvPr id="412580055" name="Slide Image Placeholder 1"/>
           <p:cNvSpPr>
             <a:spLocks noChangeAspect="1" noGrp="1" noRot="1"/>
           </p:cNvSpPr>
@@ -2147,7 +2147,7 @@
       </p:sp>
       <p:sp>
         <p:nvSpPr>
-          <p:cNvPr id="1221211013" name="Notes Placeholder 2"/>
+          <p:cNvPr id="1157960500" name="Notes Placeholder 2"/>
           <p:cNvSpPr>
             <a:spLocks noGrp="1"/>
           </p:cNvSpPr>
@@ -2169,7 +2169,7 @@
       </p:sp>
       <p:sp>
         <p:nvSpPr>
-          <p:cNvPr id="1212237839" name="Slide Number Placeholder 3"/>
+          <p:cNvPr id="2048501375" name="Slide Number Placeholder 3"/>
           <p:cNvSpPr>
             <a:spLocks noGrp="1"/>
           </p:cNvSpPr>
@@ -2220,7 +2220,7 @@
       </p:grpSpPr>
       <p:sp>
         <p:nvSpPr>
-          <p:cNvPr id="1826762534" name="Slide Image Placeholder 1"/>
+          <p:cNvPr id="587805618" name="Slide Image Placeholder 1"/>
           <p:cNvSpPr>
             <a:spLocks noChangeAspect="1" noGrp="1" noRot="1"/>
           </p:cNvSpPr>
@@ -2232,7 +2232,7 @@
       </p:sp>
       <p:sp>
         <p:nvSpPr>
-          <p:cNvPr id="593027519" name="Notes Placeholder 2"/>
+          <p:cNvPr id="1255440824" name="Notes Placeholder 2"/>
           <p:cNvSpPr>
             <a:spLocks noGrp="1"/>
           </p:cNvSpPr>
@@ -2254,7 +2254,7 @@
       </p:sp>
       <p:sp>
         <p:nvSpPr>
-          <p:cNvPr id="1368483957" name="Slide Number Placeholder 3"/>
+          <p:cNvPr id="219946194" name="Slide Number Placeholder 3"/>
           <p:cNvSpPr>
             <a:spLocks noGrp="1"/>
           </p:cNvSpPr>
@@ -2335,7 +2335,7 @@
       </p:grpSpPr>
       <p:pic>
         <p:nvPicPr>
-          <p:cNvPr id="4614825" name="Image 0" descr="preencoded.png"/>
+          <p:cNvPr id="1358301666" name="Image 0" descr="preencoded.png"/>
           <p:cNvPicPr>
             <a:picLocks noChangeAspect="1"/>
           </p:cNvPicPr>
@@ -2357,7 +2357,7 @@
       </p:pic>
       <p:sp>
         <p:nvSpPr>
-          <p:cNvPr id="1326557574" name="Shape 0"/>
+          <p:cNvPr id="570422695" name="Shape 0"/>
           <p:cNvSpPr/>
           <p:nvPr/>
         </p:nvSpPr>
@@ -2379,7 +2379,7 @@
       </p:sp>
       <p:pic>
         <p:nvPicPr>
-          <p:cNvPr id="149852957" name="Image 1" descr="preencoded.png">
+          <p:cNvPr id="1758462901" name="Image 1" descr="preencoded.png">
             <a:hlinkClick r:id="rId3" tooltip=""/>
           </p:cNvPr>
           <p:cNvPicPr>
@@ -2706,7 +2706,7 @@
       </p:grpSpPr>
       <p:sp>
         <p:nvSpPr>
-          <p:cNvPr id="2089565178" name="Text 4"/>
+          <p:cNvPr id="1212342397" name="Text 4"/>
           <p:cNvSpPr/>
           <p:nvPr/>
         </p:nvSpPr>
@@ -2752,7 +2752,7 @@
       </p:sp>
       <p:sp>
         <p:nvSpPr>
-          <p:cNvPr id="135039143" name="Text 5"/>
+          <p:cNvPr id="54092879" name="Text 5"/>
           <p:cNvSpPr/>
           <p:nvPr/>
         </p:nvSpPr>
@@ -2795,7 +2795,7 @@
       </p:sp>
       <p:pic>
         <p:nvPicPr>
-          <p:cNvPr id="653292679" name="Image 1" descr="preencoded.png"/>
+          <p:cNvPr id="400947145" name="Image 1" descr="preencoded.png"/>
           <p:cNvPicPr>
             <a:picLocks noChangeAspect="1"/>
           </p:cNvPicPr>
@@ -2823,14 +2823,14 @@
       </p:pic>
       <p:sp>
         <p:nvSpPr>
-          <p:cNvPr id="1338775887" name="Text 9"/>
+          <p:cNvPr id="299186646" name="Text 9"/>
           <p:cNvSpPr/>
           <p:nvPr/>
         </p:nvSpPr>
         <p:spPr bwMode="auto">
           <a:xfrm>
             <a:off x="811376" y="3372891"/>
-            <a:ext cx="860455" cy="194928"/>
+            <a:ext cx="860454" cy="194928"/>
           </a:xfrm>
           <a:prstGeom prst="rect">
             <a:avLst/>
@@ -2866,7 +2866,7 @@
       </p:sp>
       <p:sp>
         <p:nvSpPr>
-          <p:cNvPr id="1707552252" name="Text 10"/>
+          <p:cNvPr id="1177400688" name="Text 10"/>
           <p:cNvSpPr/>
           <p:nvPr/>
         </p:nvSpPr>
@@ -2909,14 +2909,14 @@
       </p:sp>
       <p:pic>
         <p:nvPicPr>
-          <p:cNvPr id="928186349" name="Image 2" descr="preencoded.png"/>
+          <p:cNvPr id="205460501" name="Image 2" descr="preencoded.png"/>
           <p:cNvPicPr>
             <a:picLocks noChangeAspect="1"/>
           </p:cNvPicPr>
           <p:nvPr/>
         </p:nvPicPr>
         <p:blipFill rotWithShape="1">
-          <a:blip r:embed="rId3"/>
+          <a:blip r:embed="rId5"/>
           <a:stretch/>
         </p:blipFill>
         <p:spPr bwMode="auto">
@@ -2931,7 +2931,7 @@
       </p:pic>
       <p:sp>
         <p:nvSpPr>
-          <p:cNvPr id="1247046155" name="Text 11"/>
+          <p:cNvPr id="1680322006" name="Text 11"/>
           <p:cNvSpPr/>
           <p:nvPr/>
         </p:nvSpPr>
@@ -2974,14 +2974,14 @@
       </p:sp>
       <p:sp>
         <p:nvSpPr>
-          <p:cNvPr id="1315818552" name="Text 12"/>
+          <p:cNvPr id="1671833554" name="Text 12"/>
           <p:cNvSpPr/>
           <p:nvPr/>
         </p:nvSpPr>
         <p:spPr bwMode="auto">
           <a:xfrm>
-            <a:off x="6723527" y="3641153"/>
-            <a:ext cx="819768" cy="199901"/>
+            <a:off x="6530452" y="3641152"/>
+            <a:ext cx="1257070" cy="202780"/>
           </a:xfrm>
           <a:prstGeom prst="rect">
             <a:avLst/>
@@ -3009,7 +3009,7 @@
                 <a:ea typeface="Funnel Sans"/>
                 <a:cs typeface="Funnel Sans"/>
               </a:rPr>
-              <a:t>Javeed</a:t>
+              <a:t>Mr. Javeed</a:t>
             </a:r>
             <a:endParaRPr sz="2000"/>
           </a:p>
@@ -3050,7 +3050,7 @@
       </p:grpSpPr>
       <p:pic>
         <p:nvPicPr>
-          <p:cNvPr id="1249847378" name=""/>
+          <p:cNvPr id="2050005627" name=""/>
           <p:cNvPicPr>
             <a:picLocks noChangeAspect="1"/>
           </p:cNvPicPr>
@@ -3105,7 +3105,7 @@
       </p:grpSpPr>
       <p:pic>
         <p:nvPicPr>
-          <p:cNvPr id="297452651" name=""/>
+          <p:cNvPr id="1209096424" name=""/>
           <p:cNvPicPr>
             <a:picLocks noChangeAspect="1"/>
           </p:cNvPicPr>
@@ -3160,7 +3160,7 @@
       </p:grpSpPr>
       <p:pic>
         <p:nvPicPr>
-          <p:cNvPr id="188998640" name=""/>
+          <p:cNvPr id="1815856650" name=""/>
           <p:cNvPicPr>
             <a:picLocks noChangeAspect="1"/>
           </p:cNvPicPr>
@@ -3172,7 +3172,7 @@
         </p:blipFill>
         <p:spPr bwMode="auto">
           <a:xfrm flipH="0" flipV="0">
-            <a:off x="682624" y="380999"/>
+            <a:off x="682623" y="380999"/>
             <a:ext cx="7732749" cy="4349671"/>
           </a:xfrm>
           <a:prstGeom prst="rect">
@@ -3215,7 +3215,7 @@
       </p:grpSpPr>
       <p:pic>
         <p:nvPicPr>
-          <p:cNvPr id="1623665199" name=""/>
+          <p:cNvPr id="2144697866" name=""/>
           <p:cNvPicPr>
             <a:picLocks noChangeAspect="1"/>
           </p:cNvPicPr>
@@ -3227,7 +3227,7 @@
         </p:blipFill>
         <p:spPr bwMode="auto">
           <a:xfrm flipH="0" flipV="0">
-            <a:off x="642124" y="349249"/>
+            <a:off x="642123" y="349249"/>
             <a:ext cx="7954999" cy="4474687"/>
           </a:xfrm>
           <a:prstGeom prst="rect">
@@ -3270,7 +3270,7 @@
       </p:grpSpPr>
       <p:pic>
         <p:nvPicPr>
-          <p:cNvPr id="1406806552" name=""/>
+          <p:cNvPr id="1203634599" name=""/>
           <p:cNvPicPr>
             <a:picLocks noChangeAspect="1"/>
           </p:cNvPicPr>
@@ -3325,7 +3325,7 @@
       </p:grpSpPr>
       <p:pic>
         <p:nvPicPr>
-          <p:cNvPr id="2005994992" name=""/>
+          <p:cNvPr id="340999182" name=""/>
           <p:cNvPicPr>
             <a:picLocks noChangeAspect="1"/>
           </p:cNvPicPr>
@@ -3380,7 +3380,7 @@
       </p:grpSpPr>
       <p:pic>
         <p:nvPicPr>
-          <p:cNvPr id="858508315" name=""/>
+          <p:cNvPr id="925879294" name=""/>
           <p:cNvPicPr>
             <a:picLocks noChangeAspect="1"/>
           </p:cNvPicPr>
@@ -3392,7 +3392,7 @@
         </p:blipFill>
         <p:spPr bwMode="auto">
           <a:xfrm flipH="0" flipV="0">
-            <a:off x="602437" y="285750"/>
+            <a:off x="602436" y="285750"/>
             <a:ext cx="7939125" cy="4465757"/>
           </a:xfrm>
           <a:prstGeom prst="rect">
@@ -3435,7 +3435,7 @@
       </p:grpSpPr>
       <p:pic>
         <p:nvPicPr>
-          <p:cNvPr id="210480105" name=""/>
+          <p:cNvPr id="279533987" name=""/>
           <p:cNvPicPr>
             <a:picLocks noChangeAspect="1"/>
           </p:cNvPicPr>
@@ -3490,7 +3490,7 @@
       </p:grpSpPr>
       <p:pic>
         <p:nvPicPr>
-          <p:cNvPr id="743623328" name=""/>
+          <p:cNvPr id="1242183699" name=""/>
           <p:cNvPicPr>
             <a:picLocks noChangeAspect="1"/>
           </p:cNvPicPr>
@@ -3545,7 +3545,7 @@
       </p:grpSpPr>
       <p:pic>
         <p:nvPicPr>
-          <p:cNvPr id="1246474863" name=""/>
+          <p:cNvPr id="385549475" name=""/>
           <p:cNvPicPr>
             <a:picLocks noChangeAspect="1"/>
           </p:cNvPicPr>
@@ -3557,7 +3557,7 @@
         </p:blipFill>
         <p:spPr bwMode="auto">
           <a:xfrm flipH="0" flipV="0">
-            <a:off x="475437" y="174624"/>
+            <a:off x="475437" y="174623"/>
             <a:ext cx="8193124" cy="4608632"/>
           </a:xfrm>
           <a:prstGeom prst="rect">
@@ -3600,7 +3600,7 @@
       </p:grpSpPr>
       <p:sp>
         <p:nvSpPr>
-          <p:cNvPr id="196497514" name="Text 0"/>
+          <p:cNvPr id="182428657" name="Text 0"/>
           <p:cNvSpPr/>
           <p:nvPr/>
         </p:nvSpPr>
@@ -3643,7 +3643,7 @@
       </p:sp>
       <p:sp>
         <p:nvSpPr>
-          <p:cNvPr id="887286023" name="Text 1"/>
+          <p:cNvPr id="1711381621" name="Text 1"/>
           <p:cNvSpPr/>
           <p:nvPr/>
         </p:nvSpPr>
@@ -3688,7 +3688,7 @@
       </p:sp>
       <p:sp>
         <p:nvSpPr>
-          <p:cNvPr id="1224338345" name="Shape 2"/>
+          <p:cNvPr id="2042088364" name="Shape 2"/>
           <p:cNvSpPr/>
           <p:nvPr/>
         </p:nvSpPr>
@@ -3715,7 +3715,7 @@
       </p:sp>
       <p:sp>
         <p:nvSpPr>
-          <p:cNvPr id="1565187146" name="Shape 3"/>
+          <p:cNvPr id="1263212875" name="Shape 3"/>
           <p:cNvSpPr/>
           <p:nvPr/>
         </p:nvSpPr>
@@ -3735,7 +3735,7 @@
       </p:sp>
       <p:sp>
         <p:nvSpPr>
-          <p:cNvPr id="1233774734" name="Text 4"/>
+          <p:cNvPr id="1672903575" name="Text 4"/>
           <p:cNvSpPr/>
           <p:nvPr/>
         </p:nvSpPr>
@@ -3778,7 +3778,7 @@
       </p:sp>
       <p:sp>
         <p:nvSpPr>
-          <p:cNvPr id="1306490511" name="Text 5"/>
+          <p:cNvPr id="701080442" name="Text 5"/>
           <p:cNvSpPr/>
           <p:nvPr/>
         </p:nvSpPr>
@@ -3821,7 +3821,7 @@
       </p:sp>
       <p:sp>
         <p:nvSpPr>
-          <p:cNvPr id="946542090" name="Text 6"/>
+          <p:cNvPr id="2074550141" name="Text 6"/>
           <p:cNvSpPr/>
           <p:nvPr/>
         </p:nvSpPr>
@@ -3866,7 +3866,7 @@
       </p:sp>
       <p:sp>
         <p:nvSpPr>
-          <p:cNvPr id="586214053" name="Shape 7"/>
+          <p:cNvPr id="491586335" name="Shape 7"/>
           <p:cNvSpPr/>
           <p:nvPr/>
         </p:nvSpPr>
@@ -3893,7 +3893,7 @@
       </p:sp>
       <p:sp>
         <p:nvSpPr>
-          <p:cNvPr id="1944131831" name="Shape 8"/>
+          <p:cNvPr id="784342275" name="Shape 8"/>
           <p:cNvSpPr/>
           <p:nvPr/>
         </p:nvSpPr>
@@ -3913,7 +3913,7 @@
       </p:sp>
       <p:sp>
         <p:nvSpPr>
-          <p:cNvPr id="1601723284" name="Text 9"/>
+          <p:cNvPr id="826624124" name="Text 9"/>
           <p:cNvSpPr/>
           <p:nvPr/>
         </p:nvSpPr>
@@ -3956,7 +3956,7 @@
       </p:sp>
       <p:sp>
         <p:nvSpPr>
-          <p:cNvPr id="1922963438" name="Text 10"/>
+          <p:cNvPr id="1449984732" name="Text 10"/>
           <p:cNvSpPr/>
           <p:nvPr/>
         </p:nvSpPr>
@@ -3999,7 +3999,7 @@
       </p:sp>
       <p:sp>
         <p:nvSpPr>
-          <p:cNvPr id="1712779599" name="Text 11"/>
+          <p:cNvPr id="135453211" name="Text 11"/>
           <p:cNvSpPr/>
           <p:nvPr/>
         </p:nvSpPr>
@@ -4044,7 +4044,7 @@
       </p:sp>
       <p:sp>
         <p:nvSpPr>
-          <p:cNvPr id="754086388" name="Shape 12"/>
+          <p:cNvPr id="2137767950" name="Shape 12"/>
           <p:cNvSpPr/>
           <p:nvPr/>
         </p:nvSpPr>
@@ -4071,7 +4071,7 @@
       </p:sp>
       <p:sp>
         <p:nvSpPr>
-          <p:cNvPr id="343102651" name="Shape 13"/>
+          <p:cNvPr id="71322229" name="Shape 13"/>
           <p:cNvSpPr/>
           <p:nvPr/>
         </p:nvSpPr>
@@ -4091,7 +4091,7 @@
       </p:sp>
       <p:sp>
         <p:nvSpPr>
-          <p:cNvPr id="1016674775" name="Text 14"/>
+          <p:cNvPr id="2094527732" name="Text 14"/>
           <p:cNvSpPr/>
           <p:nvPr/>
         </p:nvSpPr>
@@ -4134,7 +4134,7 @@
       </p:sp>
       <p:sp>
         <p:nvSpPr>
-          <p:cNvPr id="542724508" name="Text 15"/>
+          <p:cNvPr id="1760066005" name="Text 15"/>
           <p:cNvSpPr/>
           <p:nvPr/>
         </p:nvSpPr>
@@ -4177,7 +4177,7 @@
       </p:sp>
       <p:sp>
         <p:nvSpPr>
-          <p:cNvPr id="1046197198" name="Text 16"/>
+          <p:cNvPr id="2082811215" name="Text 16"/>
           <p:cNvSpPr/>
           <p:nvPr/>
         </p:nvSpPr>
@@ -4255,7 +4255,7 @@
       </p:grpSpPr>
       <p:pic>
         <p:nvPicPr>
-          <p:cNvPr id="1022922905" name=""/>
+          <p:cNvPr id="1483638627" name=""/>
           <p:cNvPicPr>
             <a:picLocks noChangeAspect="1"/>
           </p:cNvPicPr>
@@ -4277,7 +4277,7 @@
       </p:pic>
       <p:pic>
         <p:nvPicPr>
-          <p:cNvPr id="334653908" name=""/>
+          <p:cNvPr id="1500381945" name=""/>
           <p:cNvPicPr>
             <a:picLocks noChangeAspect="1"/>
           </p:cNvPicPr>
@@ -4332,13 +4332,13 @@
       </p:grpSpPr>
       <p:sp>
         <p:nvSpPr>
-          <p:cNvPr id="720569219" name=""/>
+          <p:cNvPr id="165132283" name=""/>
           <p:cNvSpPr txBox="1"/>
           <p:nvPr/>
         </p:nvSpPr>
         <p:spPr bwMode="auto">
           <a:xfrm rot="0" flipH="0" flipV="0">
-            <a:off x="720332" y="1349374"/>
+            <a:off x="720331" y="1349374"/>
             <a:ext cx="7544944" cy="2286360"/>
           </a:xfrm>
           <a:prstGeom prst="rect">
@@ -4419,7 +4419,7 @@
       </p:grpSpPr>
       <p:sp>
         <p:nvSpPr>
-          <p:cNvPr id="1060344423" name="Text 0"/>
+          <p:cNvPr id="754764677" name="Text 0"/>
           <p:cNvSpPr/>
           <p:nvPr/>
         </p:nvSpPr>
@@ -4462,7 +4462,7 @@
       </p:sp>
       <p:sp>
         <p:nvSpPr>
-          <p:cNvPr id="173775846" name="Text 1"/>
+          <p:cNvPr id="1121643226" name="Text 1"/>
           <p:cNvSpPr/>
           <p:nvPr/>
         </p:nvSpPr>
@@ -4510,7 +4510,7 @@
       </p:sp>
       <p:sp>
         <p:nvSpPr>
-          <p:cNvPr id="308745749" name="Shape 2"/>
+          <p:cNvPr id="1614989255" name="Shape 2"/>
           <p:cNvSpPr/>
           <p:nvPr/>
         </p:nvSpPr>
@@ -4534,7 +4534,7 @@
       </p:sp>
       <p:sp>
         <p:nvSpPr>
-          <p:cNvPr id="1923660193" name="Text 3"/>
+          <p:cNvPr id="2134454158" name="Text 3"/>
           <p:cNvSpPr/>
           <p:nvPr/>
         </p:nvSpPr>
@@ -4577,7 +4577,7 @@
       </p:sp>
       <p:sp>
         <p:nvSpPr>
-          <p:cNvPr id="445671682" name="Text 4"/>
+          <p:cNvPr id="2119726150" name="Text 4"/>
           <p:cNvSpPr/>
           <p:nvPr/>
         </p:nvSpPr>
@@ -4651,7 +4651,7 @@
                 <a:ea typeface="DejaVu Math TeX Gyre"/>
                 <a:cs typeface="DejaVu Math TeX Gyre"/>
               </a:rPr>
-              <a:t>Bootstrap CSS</a:t>
+              <a:t>Bootstrap &amp; CSS</a:t>
             </a:r>
             <a:r>
               <a:rPr lang="en-US" sz="1100">
@@ -4817,13 +4817,13 @@
       </p:sp>
       <p:sp>
         <p:nvSpPr>
-          <p:cNvPr id="85164665" name="Text 5"/>
+          <p:cNvPr id="1828458052" name="Text 5"/>
           <p:cNvSpPr/>
           <p:nvPr/>
         </p:nvSpPr>
         <p:spPr bwMode="auto">
           <a:xfrm>
-            <a:off x="4723357" y="1622821"/>
+            <a:off x="4723356" y="1429746"/>
             <a:ext cx="741866" cy="188466"/>
           </a:xfrm>
           <a:prstGeom prst="rect">
@@ -4860,13 +4860,13 @@
       </p:sp>
       <p:sp>
         <p:nvSpPr>
-          <p:cNvPr id="1149075322" name="Text 6"/>
+          <p:cNvPr id="867602103" name="Text 6"/>
           <p:cNvSpPr/>
           <p:nvPr/>
         </p:nvSpPr>
         <p:spPr bwMode="auto">
           <a:xfrm>
-            <a:off x="4723358" y="1926952"/>
+            <a:off x="4723356" y="1669519"/>
             <a:ext cx="3929286" cy="1338932"/>
           </a:xfrm>
           <a:prstGeom prst="rect">
@@ -5082,13 +5082,13 @@
       </p:sp>
       <p:sp>
         <p:nvSpPr>
-          <p:cNvPr id="1298761007" name="Text 7"/>
+          <p:cNvPr id="818139810" name="Text 7"/>
           <p:cNvSpPr/>
           <p:nvPr/>
         </p:nvSpPr>
         <p:spPr bwMode="auto">
           <a:xfrm>
-            <a:off x="4723357" y="3382267"/>
+            <a:off x="4723356" y="2931760"/>
             <a:ext cx="1690498" cy="188466"/>
           </a:xfrm>
           <a:prstGeom prst="rect">
@@ -5125,13 +5125,13 @@
       </p:sp>
       <p:sp>
         <p:nvSpPr>
-          <p:cNvPr id="1570939322" name="Text 8"/>
+          <p:cNvPr id="338231211" name="Text 8"/>
           <p:cNvSpPr/>
           <p:nvPr/>
         </p:nvSpPr>
         <p:spPr bwMode="auto">
           <a:xfrm>
-            <a:off x="4723358" y="3686398"/>
+            <a:off x="4723356" y="3171533"/>
             <a:ext cx="3929286" cy="1027584"/>
           </a:xfrm>
           <a:prstGeom prst="rect">
@@ -5243,6 +5243,106 @@
               <a:t> — Static file server + reverse proxy to Spring Boot API</a:t>
             </a:r>
             <a:endParaRPr sz="1200"/>
+          </a:p>
+        </p:txBody>
+      </p:sp>
+      <p:sp>
+        <p:nvSpPr>
+          <p:cNvPr id="1674441088" name="Text 7"/>
+          <p:cNvSpPr/>
+          <p:nvPr/>
+        </p:nvSpPr>
+        <p:spPr bwMode="auto">
+          <a:xfrm>
+            <a:off x="4747039" y="4242605"/>
+            <a:ext cx="504335" cy="190625"/>
+          </a:xfrm>
+          <a:prstGeom prst="rect">
+            <a:avLst/>
+          </a:prstGeom>
+          <a:noFill/>
+          <a:ln/>
+        </p:spPr>
+        <p:txBody>
+          <a:bodyPr wrap="none" lIns="0" tIns="0" rIns="0" bIns="0" rtlCol="0" anchor="t"/>
+          <a:lstStyle/>
+          <a:p>
+            <a:pPr marL="0" indent="0" algn="l">
+              <a:lnSpc>
+                <a:spcPct val="104000"/>
+              </a:lnSpc>
+              <a:buNone/>
+              <a:defRPr/>
+            </a:pPr>
+            <a:r>
+              <a:rPr lang="en-US" sz="1400" b="1">
+                <a:solidFill>
+                  <a:srgbClr val="373B48"/>
+                </a:solidFill>
+                <a:latin typeface="Mona Sans SemiBold"/>
+                <a:ea typeface="Mona Sans SemiBold"/>
+                <a:cs typeface="Mona Sans SemiBold"/>
+              </a:rPr>
+              <a:t>Cloud</a:t>
+            </a:r>
+            <a:endParaRPr sz="1400" b="1"/>
+          </a:p>
+        </p:txBody>
+      </p:sp>
+      <p:sp>
+        <p:nvSpPr>
+          <p:cNvPr id="624266625" name="Text 8"/>
+          <p:cNvSpPr/>
+          <p:nvPr/>
+        </p:nvSpPr>
+        <p:spPr bwMode="auto">
+          <a:xfrm>
+            <a:off x="4875757" y="4520993"/>
+            <a:ext cx="3929285" cy="1027584"/>
+          </a:xfrm>
+          <a:prstGeom prst="rect">
+            <a:avLst/>
+          </a:prstGeom>
+          <a:noFill/>
+          <a:ln/>
+        </p:spPr>
+        <p:txBody>
+          <a:bodyPr vertOverflow="overflow" horzOverflow="overflow" vert="horz" wrap="square" lIns="0" tIns="0" rIns="0" bIns="0" numCol="1" spcCol="0" rtlCol="0" fromWordArt="0" anchor="t" anchorCtr="0" forceAA="0" upright="0" compatLnSpc="0">
+            <a:normAutofit/>
+          </a:bodyPr>
+          <a:lstStyle/>
+          <a:p>
+            <a:pPr marL="182880" indent="-182880" algn="l">
+              <a:lnSpc>
+                <a:spcPct val="131000"/>
+              </a:lnSpc>
+              <a:buSzPct val="100000"/>
+              <a:buChar char="•"/>
+              <a:defRPr/>
+            </a:pPr>
+            <a:r>
+              <a:rPr lang="en-US" sz="1000" b="1">
+                <a:solidFill>
+                  <a:srgbClr val="52586B"/>
+                </a:solidFill>
+                <a:latin typeface="Funnel Sans"/>
+                <a:ea typeface="Funnel Sans"/>
+                <a:cs typeface="Funnel Sans"/>
+              </a:rPr>
+              <a:t>AWS</a:t>
+            </a:r>
+            <a:r>
+              <a:rPr lang="en-US" sz="1000">
+                <a:solidFill>
+                  <a:srgbClr val="52586B"/>
+                </a:solidFill>
+                <a:latin typeface="Funnel Sans"/>
+                <a:ea typeface="Funnel Sans"/>
+                <a:cs typeface="Funnel Sans"/>
+              </a:rPr>
+              <a:t>  — EC2 instance are used to deploy the project</a:t>
+            </a:r>
+            <a:endParaRPr sz="1000"/>
           </a:p>
         </p:txBody>
       </p:sp>
@@ -5281,7 +5381,7 @@
       </p:grpSpPr>
       <p:sp>
         <p:nvSpPr>
-          <p:cNvPr id="1320981500" name="Text 0"/>
+          <p:cNvPr id="1943971583" name="Text 0"/>
           <p:cNvSpPr/>
           <p:nvPr/>
         </p:nvSpPr>
@@ -5335,7 +5435,7 @@
       </p:sp>
       <p:pic>
         <p:nvPicPr>
-          <p:cNvPr id="1316881766" name="Image 0" descr="preencoded.png"/>
+          <p:cNvPr id="1096464787" name="Image 0" descr="preencoded.png"/>
           <p:cNvPicPr>
             <a:picLocks noChangeAspect="1"/>
           </p:cNvPicPr>
@@ -5357,7 +5457,7 @@
       </p:pic>
       <p:sp>
         <p:nvSpPr>
-          <p:cNvPr id="1596882929" name="Text 1"/>
+          <p:cNvPr id="948979226" name="Text 1"/>
           <p:cNvSpPr/>
           <p:nvPr/>
         </p:nvSpPr>
@@ -5455,7 +5555,7 @@
       </p:grpSpPr>
       <p:sp>
         <p:nvSpPr>
-          <p:cNvPr id="1912976318" name="Text 0"/>
+          <p:cNvPr id="1682642773" name="Text 0"/>
           <p:cNvSpPr/>
           <p:nvPr/>
         </p:nvSpPr>
@@ -5498,7 +5598,7 @@
       </p:sp>
       <p:sp>
         <p:nvSpPr>
-          <p:cNvPr id="1198508488" name="Text 1"/>
+          <p:cNvPr id="197634945" name="Text 1"/>
           <p:cNvSpPr/>
           <p:nvPr/>
         </p:nvSpPr>
@@ -5541,7 +5641,7 @@
       </p:sp>
       <p:pic>
         <p:nvPicPr>
-          <p:cNvPr id="1791683195" name="Image 0" descr="preencoded.png"/>
+          <p:cNvPr id="518551289" name="Image 0" descr="preencoded.png"/>
           <p:cNvPicPr>
             <a:picLocks noChangeAspect="1"/>
           </p:cNvPicPr>
@@ -5569,7 +5669,7 @@
       </p:pic>
       <p:sp>
         <p:nvSpPr>
-          <p:cNvPr id="1654312930" name="Text 2"/>
+          <p:cNvPr id="881352562" name="Text 2"/>
           <p:cNvSpPr/>
           <p:nvPr/>
         </p:nvSpPr>
@@ -5612,7 +5712,7 @@
       </p:sp>
       <p:sp>
         <p:nvSpPr>
-          <p:cNvPr id="11031953" name="Text 3"/>
+          <p:cNvPr id="258012510" name="Text 3"/>
           <p:cNvSpPr/>
           <p:nvPr/>
         </p:nvSpPr>
@@ -5661,7 +5761,7 @@
                 <a:ea typeface="Funnel Sans"/>
                 <a:cs typeface="Funnel Sans"/>
               </a:rPr>
-              <a:t> — Interactive search with autocomplete and carousel</a:t>
+              <a:t> — Interactive search field with various components</a:t>
             </a:r>
             <a:endParaRPr lang="en-US" sz="950"/>
           </a:p>
@@ -5768,7 +5868,7 @@
       </p:sp>
       <p:pic>
         <p:nvPicPr>
-          <p:cNvPr id="2011277996" name="Image 1" descr="preencoded.png"/>
+          <p:cNvPr id="2142196997" name="Image 1" descr="preencoded.png"/>
           <p:cNvPicPr>
             <a:picLocks noChangeAspect="1"/>
           </p:cNvPicPr>
@@ -5796,7 +5896,7 @@
       </p:pic>
       <p:sp>
         <p:nvSpPr>
-          <p:cNvPr id="1291886818" name="Text 4"/>
+          <p:cNvPr id="1352935996" name="Text 4"/>
           <p:cNvSpPr/>
           <p:nvPr/>
         </p:nvSpPr>
@@ -5839,7 +5939,7 @@
       </p:sp>
       <p:sp>
         <p:nvSpPr>
-          <p:cNvPr id="804018676" name="Text 5"/>
+          <p:cNvPr id="49872470" name="Text 5"/>
           <p:cNvSpPr/>
           <p:nvPr/>
         </p:nvSpPr>
@@ -5995,7 +6095,7 @@
       </p:sp>
       <p:pic>
         <p:nvPicPr>
-          <p:cNvPr id="773806705" name="Image 2" descr="preencoded.png"/>
+          <p:cNvPr id="227411943" name="Image 2" descr="preencoded.png"/>
           <p:cNvPicPr>
             <a:picLocks noChangeAspect="1"/>
           </p:cNvPicPr>
@@ -6023,7 +6123,7 @@
       </p:pic>
       <p:sp>
         <p:nvSpPr>
-          <p:cNvPr id="1523612753" name="Text 6"/>
+          <p:cNvPr id="1413866150" name="Text 6"/>
           <p:cNvSpPr/>
           <p:nvPr/>
         </p:nvSpPr>
@@ -6066,7 +6166,7 @@
       </p:sp>
       <p:sp>
         <p:nvSpPr>
-          <p:cNvPr id="1519598549" name="Text 7"/>
+          <p:cNvPr id="1168720545" name="Text 7"/>
           <p:cNvSpPr/>
           <p:nvPr/>
         </p:nvSpPr>
@@ -6255,7 +6355,7 @@
       </p:grpSpPr>
       <p:sp>
         <p:nvSpPr>
-          <p:cNvPr id="1260364818" name="Text 0"/>
+          <p:cNvPr id="424024394" name="Text 0"/>
           <p:cNvSpPr/>
           <p:nvPr/>
         </p:nvSpPr>
@@ -6298,7 +6398,7 @@
       </p:sp>
       <p:pic>
         <p:nvPicPr>
-          <p:cNvPr id="1503304871" name=""/>
+          <p:cNvPr id="247484815" name=""/>
           <p:cNvPicPr>
             <a:picLocks noChangeAspect="1"/>
           </p:cNvPicPr>
@@ -6320,7 +6420,7 @@
       </p:pic>
       <p:pic>
         <p:nvPicPr>
-          <p:cNvPr id="431745640" name=""/>
+          <p:cNvPr id="420585605" name=""/>
           <p:cNvPicPr>
             <a:picLocks noChangeAspect="1"/>
           </p:cNvPicPr>
@@ -6343,7 +6443,7 @@
       </p:pic>
       <p:sp>
         <p:nvSpPr>
-          <p:cNvPr id="582500067" name=""/>
+          <p:cNvPr id="1443640648" name=""/>
           <p:cNvSpPr txBox="1"/>
           <p:nvPr/>
         </p:nvSpPr>
@@ -6386,13 +6486,13 @@
       </p:sp>
       <p:cxnSp>
         <p:nvCxnSpPr>
-          <p:cNvPr id="308713274" name=""/>
+          <p:cNvPr id="1355831170" name=""/>
           <p:cNvCxnSpPr/>
           <p:nvPr/>
         </p:nvCxnSpPr>
         <p:spPr bwMode="auto">
           <a:xfrm flipH="0" flipV="0">
-            <a:off x="3554957" y="-77229"/>
+            <a:off x="3554956" y="-77229"/>
             <a:ext cx="0" cy="5354594"/>
           </a:xfrm>
           <a:prstGeom prst="line">
@@ -6451,7 +6551,7 @@
       </p:grpSpPr>
       <p:sp>
         <p:nvSpPr>
-          <p:cNvPr id="1548930290" name="Text 0"/>
+          <p:cNvPr id="1840118356" name="Text 0"/>
           <p:cNvSpPr/>
           <p:nvPr/>
         </p:nvSpPr>
@@ -6494,7 +6594,7 @@
       </p:sp>
       <p:pic>
         <p:nvPicPr>
-          <p:cNvPr id="744813625" name=""/>
+          <p:cNvPr id="1460855478" name=""/>
           <p:cNvPicPr>
             <a:picLocks noChangeAspect="1"/>
           </p:cNvPicPr>
@@ -6517,7 +6617,7 @@
       </p:pic>
       <p:pic>
         <p:nvPicPr>
-          <p:cNvPr id="432363625" name=""/>
+          <p:cNvPr id="2057029799" name=""/>
           <p:cNvPicPr>
             <a:picLocks noChangeAspect="1"/>
           </p:cNvPicPr>
@@ -6540,7 +6640,7 @@
       </p:pic>
       <p:pic>
         <p:nvPicPr>
-          <p:cNvPr id="1911240043" name=""/>
+          <p:cNvPr id="335924114" name=""/>
           <p:cNvPicPr>
             <a:picLocks noChangeAspect="1"/>
           </p:cNvPicPr>
@@ -6548,7 +6648,7 @@
         </p:nvPicPr>
         <p:blipFill rotWithShape="1">
           <a:blip r:embed="rId3"/>
-          <a:srcRect l="43037" t="67592" r="29975" b="0"/>
+          <a:srcRect l="43037" t="67592" r="29974" b="0"/>
           <a:stretch/>
         </p:blipFill>
         <p:spPr bwMode="auto">
@@ -6596,7 +6696,7 @@
       </p:grpSpPr>
       <p:sp>
         <p:nvSpPr>
-          <p:cNvPr id="1203971762" name="Text 0"/>
+          <p:cNvPr id="639085603" name="Text 0"/>
           <p:cNvSpPr/>
           <p:nvPr/>
         </p:nvSpPr>
@@ -6639,7 +6739,7 @@
       </p:sp>
       <p:pic>
         <p:nvPicPr>
-          <p:cNvPr id="888239763" name=""/>
+          <p:cNvPr id="1610549662" name=""/>
           <p:cNvPicPr>
             <a:picLocks noChangeAspect="1"/>
           </p:cNvPicPr>
@@ -6694,7 +6794,7 @@
       </p:grpSpPr>
       <p:pic>
         <p:nvPicPr>
-          <p:cNvPr id="937795156" name=""/>
+          <p:cNvPr id="1162261331" name=""/>
           <p:cNvPicPr>
             <a:picLocks noChangeAspect="1"/>
           </p:cNvPicPr>
